--- a/assets/powerpoints/module-n1-orientation/A2-trois-sons-pour-commencer.pptx
+++ b/assets/powerpoints/module-n1-orientation/A2-trois-sons-pour-commencer.pptx
@@ -8914,7 +8914,151 @@
                 </a:solidFill>
                 <a:latin typeface="Verdana"/>
               </a:rPr>
-              <a:t>On écrit &lt;b&gt;o&lt;/b&gt; puis &lt;b&gt;u&lt;/b&gt;, mais on ne dit pas « o-u » : on dit un seul son, les lèvres en rond. &lt;b&gt;l&lt;u&gt;ou&lt;/u&gt;p&lt;/b&gt; · &lt;b&gt;n&lt;u&gt;ou&lt;/u&gt;s&lt;/b&gt; · &lt;b&gt;p&lt;u&gt;ou&lt;/u&gt;ssez&lt;/b&gt;.</a:t>
+              <a:t>On écrit </a:t>
+            </a:r>
+            <a:r>
+              <a:rPr sz="2000" b="1" i="0">
+                <a:solidFill>
+                  <a:srgbClr val="4B4F52"/>
+                </a:solidFill>
+                <a:latin typeface="Verdana"/>
+              </a:rPr>
+              <a:t>o</a:t>
+            </a:r>
+            <a:r>
+              <a:rPr sz="2000" b="0" i="0">
+                <a:solidFill>
+                  <a:srgbClr val="4B4F52"/>
+                </a:solidFill>
+                <a:latin typeface="Verdana"/>
+              </a:rPr>
+              <a:t> puis </a:t>
+            </a:r>
+            <a:r>
+              <a:rPr sz="2000" b="1" i="0">
+                <a:solidFill>
+                  <a:srgbClr val="4B4F52"/>
+                </a:solidFill>
+                <a:latin typeface="Verdana"/>
+              </a:rPr>
+              <a:t>u</a:t>
+            </a:r>
+            <a:r>
+              <a:rPr sz="2000" b="0" i="0">
+                <a:solidFill>
+                  <a:srgbClr val="4B4F52"/>
+                </a:solidFill>
+                <a:latin typeface="Verdana"/>
+              </a:rPr>
+              <a:t>, mais on ne dit pas « o-u » : on dit un seul son, les lèvres en rond. </a:t>
+            </a:r>
+            <a:r>
+              <a:rPr sz="2000" b="1" i="0">
+                <a:solidFill>
+                  <a:srgbClr val="4B4F52"/>
+                </a:solidFill>
+                <a:latin typeface="Verdana"/>
+              </a:rPr>
+              <a:t>l</a:t>
+            </a:r>
+            <a:r>
+              <a:rPr sz="2000" b="1" i="0" u="sng">
+                <a:solidFill>
+                  <a:srgbClr val="4B4F52"/>
+                </a:solidFill>
+                <a:latin typeface="Verdana"/>
+              </a:rPr>
+              <a:t>ou</a:t>
+            </a:r>
+            <a:r>
+              <a:rPr sz="2000" b="1" i="0">
+                <a:solidFill>
+                  <a:srgbClr val="4B4F52"/>
+                </a:solidFill>
+                <a:latin typeface="Verdana"/>
+              </a:rPr>
+              <a:t>p</a:t>
+            </a:r>
+            <a:r>
+              <a:rPr sz="2000" b="0" i="0">
+                <a:solidFill>
+                  <a:srgbClr val="4B4F52"/>
+                </a:solidFill>
+                <a:latin typeface="Verdana"/>
+              </a:rPr>
+              <a:t> · </a:t>
+            </a:r>
+            <a:r>
+              <a:rPr sz="2000" b="1" i="0">
+                <a:solidFill>
+                  <a:srgbClr val="4B4F52"/>
+                </a:solidFill>
+                <a:latin typeface="Verdana"/>
+              </a:rPr>
+              <a:t>n</a:t>
+            </a:r>
+            <a:r>
+              <a:rPr sz="2000" b="1" i="0" u="sng">
+                <a:solidFill>
+                  <a:srgbClr val="4B4F52"/>
+                </a:solidFill>
+                <a:latin typeface="Verdana"/>
+              </a:rPr>
+              <a:t>ou</a:t>
+            </a:r>
+            <a:r>
+              <a:rPr sz="2000" b="1" i="0">
+                <a:solidFill>
+                  <a:srgbClr val="4B4F52"/>
+                </a:solidFill>
+                <a:latin typeface="Verdana"/>
+              </a:rPr>
+              <a:t>s</a:t>
+            </a:r>
+            <a:r>
+              <a:rPr sz="2000" b="0" i="0">
+                <a:solidFill>
+                  <a:srgbClr val="4B4F52"/>
+                </a:solidFill>
+                <a:latin typeface="Verdana"/>
+              </a:rPr>
+              <a:t> · </a:t>
+            </a:r>
+            <a:r>
+              <a:rPr sz="2000" b="1" i="0">
+                <a:solidFill>
+                  <a:srgbClr val="4B4F52"/>
+                </a:solidFill>
+                <a:latin typeface="Verdana"/>
+              </a:rPr>
+              <a:t>p</a:t>
+            </a:r>
+            <a:r>
+              <a:rPr sz="2000" b="1" i="0" u="sng">
+                <a:solidFill>
+                  <a:srgbClr val="4B4F52"/>
+                </a:solidFill>
+                <a:latin typeface="Verdana"/>
+              </a:rPr>
+              <a:t>ou</a:t>
+            </a:r>
+            <a:r>
+              <a:rPr sz="2000" b="1" i="0">
+                <a:solidFill>
+                  <a:srgbClr val="4B4F52"/>
+                </a:solidFill>
+                <a:latin typeface="Verdana"/>
+              </a:rPr>
+              <a:t>ssez</a:t>
+            </a:r>
+            <a:r>
+              <a:rPr sz="2000" b="0" i="0">
+                <a:solidFill>
+                  <a:srgbClr val="4B4F52"/>
+                </a:solidFill>
+                <a:latin typeface="Verdana"/>
+              </a:rPr>
+              <a:t>.</a:t>
             </a:r>
           </a:p>
         </p:txBody>
